--- a/courses/csci246/spring26/slides/03_13_26_algorithmic_analysis.pptx
+++ b/courses/csci246/spring26/slides/03_13_26_algorithmic_analysis.pptx
@@ -228,7 +228,7 @@
           <a:p>
             <a:fld id="{B7930911-D214-D045-9349-C37725674895}" type="datetimeFigureOut">
               <a:rPr lang="en-US" smtClean="0"/>
-              <a:t>3/12/2026</a:t>
+              <a:t>3/13/26</a:t>
             </a:fld>
             <a:endParaRPr lang="en-US"/>
           </a:p>
@@ -1674,7 +1674,7 @@
           <a:p>
             <a:fld id="{05900130-2E42-9F4E-B9EA-739EF1E7DBD9}" type="datetimeFigureOut">
               <a:rPr lang="en-US" smtClean="0"/>
-              <a:t>3/12/2026</a:t>
+              <a:t>3/13/26</a:t>
             </a:fld>
             <a:endParaRPr lang="en-US"/>
           </a:p>
@@ -1872,7 +1872,7 @@
           <a:p>
             <a:fld id="{05900130-2E42-9F4E-B9EA-739EF1E7DBD9}" type="datetimeFigureOut">
               <a:rPr lang="en-US" smtClean="0"/>
-              <a:t>3/12/2026</a:t>
+              <a:t>3/13/26</a:t>
             </a:fld>
             <a:endParaRPr lang="en-US"/>
           </a:p>
@@ -2080,7 +2080,7 @@
           <a:p>
             <a:fld id="{05900130-2E42-9F4E-B9EA-739EF1E7DBD9}" type="datetimeFigureOut">
               <a:rPr lang="en-US" smtClean="0"/>
-              <a:t>3/12/2026</a:t>
+              <a:t>3/13/26</a:t>
             </a:fld>
             <a:endParaRPr lang="en-US"/>
           </a:p>
@@ -2278,7 +2278,7 @@
           <a:p>
             <a:fld id="{05900130-2E42-9F4E-B9EA-739EF1E7DBD9}" type="datetimeFigureOut">
               <a:rPr lang="en-US" smtClean="0"/>
-              <a:t>3/12/2026</a:t>
+              <a:t>3/13/26</a:t>
             </a:fld>
             <a:endParaRPr lang="en-US"/>
           </a:p>
@@ -2553,7 +2553,7 @@
           <a:p>
             <a:fld id="{05900130-2E42-9F4E-B9EA-739EF1E7DBD9}" type="datetimeFigureOut">
               <a:rPr lang="en-US" smtClean="0"/>
-              <a:t>3/12/2026</a:t>
+              <a:t>3/13/26</a:t>
             </a:fld>
             <a:endParaRPr lang="en-US"/>
           </a:p>
@@ -2818,7 +2818,7 @@
           <a:p>
             <a:fld id="{05900130-2E42-9F4E-B9EA-739EF1E7DBD9}" type="datetimeFigureOut">
               <a:rPr lang="en-US" smtClean="0"/>
-              <a:t>3/12/2026</a:t>
+              <a:t>3/13/26</a:t>
             </a:fld>
             <a:endParaRPr lang="en-US"/>
           </a:p>
@@ -3230,7 +3230,7 @@
           <a:p>
             <a:fld id="{05900130-2E42-9F4E-B9EA-739EF1E7DBD9}" type="datetimeFigureOut">
               <a:rPr lang="en-US" smtClean="0"/>
-              <a:t>3/12/2026</a:t>
+              <a:t>3/13/26</a:t>
             </a:fld>
             <a:endParaRPr lang="en-US"/>
           </a:p>
@@ -3371,7 +3371,7 @@
           <a:p>
             <a:fld id="{05900130-2E42-9F4E-B9EA-739EF1E7DBD9}" type="datetimeFigureOut">
               <a:rPr lang="en-US" smtClean="0"/>
-              <a:t>3/12/2026</a:t>
+              <a:t>3/13/26</a:t>
             </a:fld>
             <a:endParaRPr lang="en-US"/>
           </a:p>
@@ -3484,7 +3484,7 @@
           <a:p>
             <a:fld id="{05900130-2E42-9F4E-B9EA-739EF1E7DBD9}" type="datetimeFigureOut">
               <a:rPr lang="en-US" smtClean="0"/>
-              <a:t>3/12/2026</a:t>
+              <a:t>3/13/26</a:t>
             </a:fld>
             <a:endParaRPr lang="en-US"/>
           </a:p>
@@ -3795,7 +3795,7 @@
           <a:p>
             <a:fld id="{05900130-2E42-9F4E-B9EA-739EF1E7DBD9}" type="datetimeFigureOut">
               <a:rPr lang="en-US" smtClean="0"/>
-              <a:t>3/12/2026</a:t>
+              <a:t>3/13/26</a:t>
             </a:fld>
             <a:endParaRPr lang="en-US"/>
           </a:p>
@@ -4083,7 +4083,7 @@
           <a:p>
             <a:fld id="{05900130-2E42-9F4E-B9EA-739EF1E7DBD9}" type="datetimeFigureOut">
               <a:rPr lang="en-US" smtClean="0"/>
-              <a:t>3/12/2026</a:t>
+              <a:t>3/13/26</a:t>
             </a:fld>
             <a:endParaRPr lang="en-US"/>
           </a:p>
@@ -4324,7 +4324,7 @@
           <a:p>
             <a:fld id="{05900130-2E42-9F4E-B9EA-739EF1E7DBD9}" type="datetimeFigureOut">
               <a:rPr lang="en-US" smtClean="0"/>
-              <a:t>3/12/2026</a:t>
+              <a:t>3/13/26</a:t>
             </a:fld>
             <a:endParaRPr lang="en-US"/>
           </a:p>
@@ -5203,10 +5203,13 @@
                 <a14:m>
                   <m:oMath xmlns:m="http://schemas.openxmlformats.org/officeDocument/2006/math">
                     <m:r>
-                      <a:rPr lang="en-US" sz="2800" b="0" i="1" smtClean="0">
+                      <m:rPr>
+                        <m:sty m:val="p"/>
+                      </m:rPr>
+                      <a:rPr lang="en-US" sz="2800" b="0" i="0" smtClean="0">
                         <a:latin typeface="Cambria Math" panose="02040503050406030204" pitchFamily="18" charset="0"/>
                       </a:rPr>
-                      <m:t>𝑂</m:t>
+                      <m:t>Θ</m:t>
                     </m:r>
                     <m:r>
                       <a:rPr lang="en-US" sz="2800" b="0" i="1" smtClean="0">
@@ -5298,7 +5301,7 @@
               <a:blipFill>
                 <a:blip r:embed="rId3"/>
                 <a:stretch>
-                  <a:fillRect t="-6509" b="-15976"/>
+                  <a:fillRect t="-7317" b="-14634"/>
                 </a:stretch>
               </a:blipFill>
             </p:spPr>
@@ -5557,8 +5560,8 @@
           </a:p>
         </p:txBody>
       </p:sp>
-      <mc:AlternateContent xmlns:mc="http://schemas.openxmlformats.org/markup-compatibility/2006">
-        <mc:Choice xmlns:a14="http://schemas.microsoft.com/office/drawing/2010/main" Requires="a14">
+      <mc:AlternateContent xmlns:mc="http://schemas.openxmlformats.org/markup-compatibility/2006" xmlns:a14="http://schemas.microsoft.com/office/drawing/2010/main">
+        <mc:Choice Requires="a14">
           <p:sp>
             <p:nvSpPr>
               <p:cNvPr id="23" name="TextBox 22">
@@ -5587,6 +5590,7 @@
               </a:bodyPr>
               <a:lstStyle/>
               <a:p>
+                <a:pPr/>
                 <a14:m>
                   <m:oMathPara xmlns:m="http://schemas.openxmlformats.org/officeDocument/2006/math">
                     <m:oMathParaPr>
@@ -5781,7 +5785,7 @@
             </p:txBody>
           </p:sp>
         </mc:Choice>
-        <mc:Fallback>
+        <mc:Fallback xmlns="">
           <p:sp>
             <p:nvSpPr>
               <p:cNvPr id="23" name="TextBox 22">
@@ -6545,10 +6549,13 @@
                 <a14:m>
                   <m:oMath xmlns:m="http://schemas.openxmlformats.org/officeDocument/2006/math">
                     <m:r>
-                      <a:rPr lang="en-US" sz="2800" b="0" i="1" smtClean="0">
+                      <m:rPr>
+                        <m:sty m:val="p"/>
+                      </m:rPr>
+                      <a:rPr lang="en-US" sz="2800" b="0" i="0" smtClean="0">
                         <a:latin typeface="Cambria Math" panose="02040503050406030204" pitchFamily="18" charset="0"/>
                       </a:rPr>
-                      <m:t>𝑂</m:t>
+                      <m:t>Θ</m:t>
                     </m:r>
                     <m:r>
                       <a:rPr lang="en-US" sz="2800" b="0" i="1" smtClean="0">
@@ -6640,7 +6647,7 @@
               <a:blipFill>
                 <a:blip r:embed="rId3"/>
                 <a:stretch>
-                  <a:fillRect t="-6509" b="-15976"/>
+                  <a:fillRect t="-7317" b="-14634"/>
                 </a:stretch>
               </a:blipFill>
             </p:spPr>
@@ -6907,8 +6914,8 @@
           </a:p>
         </p:txBody>
       </p:sp>
-      <mc:AlternateContent xmlns:mc="http://schemas.openxmlformats.org/markup-compatibility/2006">
-        <mc:Choice xmlns:a14="http://schemas.microsoft.com/office/drawing/2010/main" Requires="a14">
+      <mc:AlternateContent xmlns:mc="http://schemas.openxmlformats.org/markup-compatibility/2006" xmlns:a14="http://schemas.microsoft.com/office/drawing/2010/main">
+        <mc:Choice Requires="a14">
           <p:sp>
             <p:nvSpPr>
               <p:cNvPr id="23" name="TextBox 22">
@@ -7177,7 +7184,7 @@
             </p:txBody>
           </p:sp>
         </mc:Choice>
-        <mc:Fallback>
+        <mc:Fallback xmlns="">
           <p:sp>
             <p:nvSpPr>
               <p:cNvPr id="23" name="TextBox 22">
@@ -8267,8 +8274,8 @@
           </a:p>
         </p:txBody>
       </p:sp>
-      <mc:AlternateContent xmlns:mc="http://schemas.openxmlformats.org/markup-compatibility/2006">
-        <mc:Choice xmlns:a14="http://schemas.microsoft.com/office/drawing/2010/main" Requires="a14">
+      <mc:AlternateContent xmlns:mc="http://schemas.openxmlformats.org/markup-compatibility/2006" xmlns:a14="http://schemas.microsoft.com/office/drawing/2010/main">
+        <mc:Choice Requires="a14">
           <p:sp>
             <p:nvSpPr>
               <p:cNvPr id="8" name="TextBox 7">
@@ -8377,7 +8384,7 @@
             </p:txBody>
           </p:sp>
         </mc:Choice>
-        <mc:Fallback>
+        <mc:Fallback xmlns="">
           <p:sp>
             <p:nvSpPr>
               <p:cNvPr id="8" name="TextBox 7">
@@ -8478,8 +8485,8 @@
           </a:p>
         </p:txBody>
       </p:sp>
-      <mc:AlternateContent xmlns:mc="http://schemas.openxmlformats.org/markup-compatibility/2006">
-        <mc:Choice xmlns:a14="http://schemas.microsoft.com/office/drawing/2010/main" Requires="a14">
+      <mc:AlternateContent xmlns:mc="http://schemas.openxmlformats.org/markup-compatibility/2006" xmlns:a14="http://schemas.microsoft.com/office/drawing/2010/main">
+        <mc:Choice Requires="a14">
           <p:sp>
             <p:nvSpPr>
               <p:cNvPr id="10" name="TextBox 9">
@@ -8588,7 +8595,7 @@
             </p:txBody>
           </p:sp>
         </mc:Choice>
-        <mc:Fallback>
+        <mc:Fallback xmlns="">
           <p:sp>
             <p:nvSpPr>
               <p:cNvPr id="10" name="TextBox 9">
@@ -8689,8 +8696,8 @@
           </a:p>
         </p:txBody>
       </p:sp>
-      <mc:AlternateContent xmlns:mc="http://schemas.openxmlformats.org/markup-compatibility/2006">
-        <mc:Choice xmlns:a14="http://schemas.microsoft.com/office/drawing/2010/main" Requires="a14">
+      <mc:AlternateContent xmlns:mc="http://schemas.openxmlformats.org/markup-compatibility/2006" xmlns:a14="http://schemas.microsoft.com/office/drawing/2010/main">
+        <mc:Choice Requires="a14">
           <p:sp>
             <p:nvSpPr>
               <p:cNvPr id="12" name="TextBox 11">
@@ -8799,7 +8806,7 @@
             </p:txBody>
           </p:sp>
         </mc:Choice>
-        <mc:Fallback>
+        <mc:Fallback xmlns="">
           <p:sp>
             <p:nvSpPr>
               <p:cNvPr id="12" name="TextBox 11">
@@ -8900,8 +8907,8 @@
           </a:p>
         </p:txBody>
       </p:sp>
-      <mc:AlternateContent xmlns:mc="http://schemas.openxmlformats.org/markup-compatibility/2006">
-        <mc:Choice xmlns:a14="http://schemas.microsoft.com/office/drawing/2010/main" Requires="a14">
+      <mc:AlternateContent xmlns:mc="http://schemas.openxmlformats.org/markup-compatibility/2006" xmlns:a14="http://schemas.microsoft.com/office/drawing/2010/main">
+        <mc:Choice Requires="a14">
           <p:sp>
             <p:nvSpPr>
               <p:cNvPr id="14" name="TextBox 13">
@@ -9010,7 +9017,7 @@
             </p:txBody>
           </p:sp>
         </mc:Choice>
-        <mc:Fallback>
+        <mc:Fallback xmlns="">
           <p:sp>
             <p:nvSpPr>
               <p:cNvPr id="14" name="TextBox 13">
@@ -9111,8 +9118,8 @@
           </a:p>
         </p:txBody>
       </p:sp>
-      <mc:AlternateContent xmlns:mc="http://schemas.openxmlformats.org/markup-compatibility/2006">
-        <mc:Choice xmlns:a14="http://schemas.microsoft.com/office/drawing/2010/main" Requires="a14">
+      <mc:AlternateContent xmlns:mc="http://schemas.openxmlformats.org/markup-compatibility/2006" xmlns:a14="http://schemas.microsoft.com/office/drawing/2010/main">
+        <mc:Choice Requires="a14">
           <p:sp>
             <p:nvSpPr>
               <p:cNvPr id="21" name="TextBox 20">
@@ -9221,7 +9228,7 @@
             </p:txBody>
           </p:sp>
         </mc:Choice>
-        <mc:Fallback>
+        <mc:Fallback xmlns="">
           <p:sp>
             <p:nvSpPr>
               <p:cNvPr id="21" name="TextBox 20">
@@ -10603,8 +10610,8 @@
           </a:p>
         </p:txBody>
       </p:sp>
-      <mc:AlternateContent xmlns:mc="http://schemas.openxmlformats.org/markup-compatibility/2006">
-        <mc:Choice xmlns:a14="http://schemas.microsoft.com/office/drawing/2010/main" Requires="a14">
+      <mc:AlternateContent xmlns:mc="http://schemas.openxmlformats.org/markup-compatibility/2006" xmlns:a14="http://schemas.microsoft.com/office/drawing/2010/main">
+        <mc:Choice Requires="a14">
           <p:sp>
             <p:nvSpPr>
               <p:cNvPr id="8" name="TextBox 7">
@@ -10713,7 +10720,7 @@
             </p:txBody>
           </p:sp>
         </mc:Choice>
-        <mc:Fallback>
+        <mc:Fallback xmlns="">
           <p:sp>
             <p:nvSpPr>
               <p:cNvPr id="8" name="TextBox 7">
@@ -10814,8 +10821,8 @@
           </a:p>
         </p:txBody>
       </p:sp>
-      <mc:AlternateContent xmlns:mc="http://schemas.openxmlformats.org/markup-compatibility/2006">
-        <mc:Choice xmlns:a14="http://schemas.microsoft.com/office/drawing/2010/main" Requires="a14">
+      <mc:AlternateContent xmlns:mc="http://schemas.openxmlformats.org/markup-compatibility/2006" xmlns:a14="http://schemas.microsoft.com/office/drawing/2010/main">
+        <mc:Choice Requires="a14">
           <p:sp>
             <p:nvSpPr>
               <p:cNvPr id="10" name="TextBox 9">
@@ -10924,7 +10931,7 @@
             </p:txBody>
           </p:sp>
         </mc:Choice>
-        <mc:Fallback>
+        <mc:Fallback xmlns="">
           <p:sp>
             <p:nvSpPr>
               <p:cNvPr id="10" name="TextBox 9">
@@ -11025,8 +11032,8 @@
           </a:p>
         </p:txBody>
       </p:sp>
-      <mc:AlternateContent xmlns:mc="http://schemas.openxmlformats.org/markup-compatibility/2006">
-        <mc:Choice xmlns:a14="http://schemas.microsoft.com/office/drawing/2010/main" Requires="a14">
+      <mc:AlternateContent xmlns:mc="http://schemas.openxmlformats.org/markup-compatibility/2006" xmlns:a14="http://schemas.microsoft.com/office/drawing/2010/main">
+        <mc:Choice Requires="a14">
           <p:sp>
             <p:nvSpPr>
               <p:cNvPr id="12" name="TextBox 11">
@@ -11135,7 +11142,7 @@
             </p:txBody>
           </p:sp>
         </mc:Choice>
-        <mc:Fallback>
+        <mc:Fallback xmlns="">
           <p:sp>
             <p:nvSpPr>
               <p:cNvPr id="12" name="TextBox 11">
@@ -11236,8 +11243,8 @@
           </a:p>
         </p:txBody>
       </p:sp>
-      <mc:AlternateContent xmlns:mc="http://schemas.openxmlformats.org/markup-compatibility/2006">
-        <mc:Choice xmlns:a14="http://schemas.microsoft.com/office/drawing/2010/main" Requires="a14">
+      <mc:AlternateContent xmlns:mc="http://schemas.openxmlformats.org/markup-compatibility/2006" xmlns:a14="http://schemas.microsoft.com/office/drawing/2010/main">
+        <mc:Choice Requires="a14">
           <p:sp>
             <p:nvSpPr>
               <p:cNvPr id="21" name="TextBox 20">
@@ -11346,7 +11353,7 @@
             </p:txBody>
           </p:sp>
         </mc:Choice>
-        <mc:Fallback>
+        <mc:Fallback xmlns="">
           <p:sp>
             <p:nvSpPr>
               <p:cNvPr id="21" name="TextBox 20">
@@ -11536,8 +11543,8 @@
           </a:p>
         </p:txBody>
       </p:sp>
-      <mc:AlternateContent xmlns:mc="http://schemas.openxmlformats.org/markup-compatibility/2006">
-        <mc:Choice xmlns:a14="http://schemas.microsoft.com/office/drawing/2010/main" Requires="a14">
+      <mc:AlternateContent xmlns:mc="http://schemas.openxmlformats.org/markup-compatibility/2006" xmlns:a14="http://schemas.microsoft.com/office/drawing/2010/main">
+        <mc:Choice Requires="a14">
           <p:sp>
             <p:nvSpPr>
               <p:cNvPr id="44" name="TextBox 43">
@@ -11613,7 +11620,7 @@
             </p:txBody>
           </p:sp>
         </mc:Choice>
-        <mc:Fallback>
+        <mc:Fallback xmlns="">
           <p:sp>
             <p:nvSpPr>
               <p:cNvPr id="44" name="TextBox 43">
@@ -11658,8 +11665,8 @@
           </p:sp>
         </mc:Fallback>
       </mc:AlternateContent>
-      <mc:AlternateContent xmlns:mc="http://schemas.openxmlformats.org/markup-compatibility/2006">
-        <mc:Choice xmlns:a14="http://schemas.microsoft.com/office/drawing/2010/main" Requires="a14">
+      <mc:AlternateContent xmlns:mc="http://schemas.openxmlformats.org/markup-compatibility/2006" xmlns:a14="http://schemas.microsoft.com/office/drawing/2010/main">
+        <mc:Choice Requires="a14">
           <p:sp>
             <p:nvSpPr>
               <p:cNvPr id="5" name="TextBox 4">
@@ -11688,6 +11695,7 @@
               </a:bodyPr>
               <a:lstStyle/>
               <a:p>
+                <a:pPr/>
                 <a14:m>
                   <m:oMathPara xmlns:m="http://schemas.openxmlformats.org/officeDocument/2006/math">
                     <m:oMathParaPr>
@@ -11731,7 +11739,7 @@
             </p:txBody>
           </p:sp>
         </mc:Choice>
-        <mc:Fallback>
+        <mc:Fallback xmlns="">
           <p:sp>
             <p:nvSpPr>
               <p:cNvPr id="5" name="TextBox 4">
@@ -11776,8 +11784,8 @@
           </p:sp>
         </mc:Fallback>
       </mc:AlternateContent>
-      <mc:AlternateContent xmlns:mc="http://schemas.openxmlformats.org/markup-compatibility/2006">
-        <mc:Choice xmlns:a14="http://schemas.microsoft.com/office/drawing/2010/main" Requires="a14">
+      <mc:AlternateContent xmlns:mc="http://schemas.openxmlformats.org/markup-compatibility/2006" xmlns:a14="http://schemas.microsoft.com/office/drawing/2010/main">
+        <mc:Choice Requires="a14">
           <p:sp>
             <p:nvSpPr>
               <p:cNvPr id="7" name="TextBox 6">
@@ -11806,6 +11814,7 @@
               </a:bodyPr>
               <a:lstStyle/>
               <a:p>
+                <a:pPr/>
                 <a14:m>
                   <m:oMathPara xmlns:m="http://schemas.openxmlformats.org/officeDocument/2006/math">
                     <m:oMathParaPr>
@@ -11879,7 +11888,7 @@
             </p:txBody>
           </p:sp>
         </mc:Choice>
-        <mc:Fallback>
+        <mc:Fallback xmlns="">
           <p:sp>
             <p:nvSpPr>
               <p:cNvPr id="7" name="TextBox 6">
@@ -12115,8 +12124,8 @@
           </a:p>
         </p:txBody>
       </p:sp>
-      <mc:AlternateContent xmlns:mc="http://schemas.openxmlformats.org/markup-compatibility/2006">
-        <mc:Choice xmlns:a14="http://schemas.microsoft.com/office/drawing/2010/main" Requires="a14">
+      <mc:AlternateContent xmlns:mc="http://schemas.openxmlformats.org/markup-compatibility/2006" xmlns:a14="http://schemas.microsoft.com/office/drawing/2010/main">
+        <mc:Choice Requires="a14">
           <p:sp>
             <p:nvSpPr>
               <p:cNvPr id="30" name="TextBox 29">
@@ -12166,7 +12175,7 @@
             </p:txBody>
           </p:sp>
         </mc:Choice>
-        <mc:Fallback>
+        <mc:Fallback xmlns="">
           <p:sp>
             <p:nvSpPr>
               <p:cNvPr id="30" name="TextBox 29">
@@ -12678,8 +12687,8 @@
           </a:p>
         </p:txBody>
       </p:sp>
-      <mc:AlternateContent xmlns:mc="http://schemas.openxmlformats.org/markup-compatibility/2006">
-        <mc:Choice xmlns:a14="http://schemas.microsoft.com/office/drawing/2010/main" Requires="a14">
+      <mc:AlternateContent xmlns:mc="http://schemas.openxmlformats.org/markup-compatibility/2006" xmlns:a14="http://schemas.microsoft.com/office/drawing/2010/main">
+        <mc:Choice Requires="a14">
           <p:sp>
             <p:nvSpPr>
               <p:cNvPr id="8" name="TextBox 7">
@@ -12788,7 +12797,7 @@
             </p:txBody>
           </p:sp>
         </mc:Choice>
-        <mc:Fallback>
+        <mc:Fallback xmlns="">
           <p:sp>
             <p:nvSpPr>
               <p:cNvPr id="8" name="TextBox 7">
@@ -12889,8 +12898,8 @@
           </a:p>
         </p:txBody>
       </p:sp>
-      <mc:AlternateContent xmlns:mc="http://schemas.openxmlformats.org/markup-compatibility/2006">
-        <mc:Choice xmlns:a14="http://schemas.microsoft.com/office/drawing/2010/main" Requires="a14">
+      <mc:AlternateContent xmlns:mc="http://schemas.openxmlformats.org/markup-compatibility/2006" xmlns:a14="http://schemas.microsoft.com/office/drawing/2010/main">
+        <mc:Choice Requires="a14">
           <p:sp>
             <p:nvSpPr>
               <p:cNvPr id="10" name="TextBox 9">
@@ -12999,7 +13008,7 @@
             </p:txBody>
           </p:sp>
         </mc:Choice>
-        <mc:Fallback>
+        <mc:Fallback xmlns="">
           <p:sp>
             <p:nvSpPr>
               <p:cNvPr id="10" name="TextBox 9">
@@ -13100,8 +13109,8 @@
           </a:p>
         </p:txBody>
       </p:sp>
-      <mc:AlternateContent xmlns:mc="http://schemas.openxmlformats.org/markup-compatibility/2006">
-        <mc:Choice xmlns:a14="http://schemas.microsoft.com/office/drawing/2010/main" Requires="a14">
+      <mc:AlternateContent xmlns:mc="http://schemas.openxmlformats.org/markup-compatibility/2006" xmlns:a14="http://schemas.microsoft.com/office/drawing/2010/main">
+        <mc:Choice Requires="a14">
           <p:sp>
             <p:nvSpPr>
               <p:cNvPr id="12" name="TextBox 11">
@@ -13210,7 +13219,7 @@
             </p:txBody>
           </p:sp>
         </mc:Choice>
-        <mc:Fallback>
+        <mc:Fallback xmlns="">
           <p:sp>
             <p:nvSpPr>
               <p:cNvPr id="12" name="TextBox 11">
@@ -13311,8 +13320,8 @@
           </a:p>
         </p:txBody>
       </p:sp>
-      <mc:AlternateContent xmlns:mc="http://schemas.openxmlformats.org/markup-compatibility/2006">
-        <mc:Choice xmlns:a14="http://schemas.microsoft.com/office/drawing/2010/main" Requires="a14">
+      <mc:AlternateContent xmlns:mc="http://schemas.openxmlformats.org/markup-compatibility/2006" xmlns:a14="http://schemas.microsoft.com/office/drawing/2010/main">
+        <mc:Choice Requires="a14">
           <p:sp>
             <p:nvSpPr>
               <p:cNvPr id="21" name="TextBox 20">
@@ -13421,7 +13430,7 @@
             </p:txBody>
           </p:sp>
         </mc:Choice>
-        <mc:Fallback>
+        <mc:Fallback xmlns="">
           <p:sp>
             <p:nvSpPr>
               <p:cNvPr id="21" name="TextBox 20">
@@ -13610,8 +13619,8 @@
           </a:p>
         </p:txBody>
       </p:sp>
-      <mc:AlternateContent xmlns:mc="http://schemas.openxmlformats.org/markup-compatibility/2006">
-        <mc:Choice xmlns:a14="http://schemas.microsoft.com/office/drawing/2010/main" Requires="a14">
+      <mc:AlternateContent xmlns:mc="http://schemas.openxmlformats.org/markup-compatibility/2006" xmlns:a14="http://schemas.microsoft.com/office/drawing/2010/main">
+        <mc:Choice Requires="a14">
           <p:sp>
             <p:nvSpPr>
               <p:cNvPr id="44" name="TextBox 43">
@@ -13702,7 +13711,7 @@
             </p:txBody>
           </p:sp>
         </mc:Choice>
-        <mc:Fallback>
+        <mc:Fallback xmlns="">
           <p:sp>
             <p:nvSpPr>
               <p:cNvPr id="44" name="TextBox 43">
@@ -13747,8 +13756,8 @@
           </p:sp>
         </mc:Fallback>
       </mc:AlternateContent>
-      <mc:AlternateContent xmlns:mc="http://schemas.openxmlformats.org/markup-compatibility/2006">
-        <mc:Choice xmlns:a14="http://schemas.microsoft.com/office/drawing/2010/main" Requires="a14">
+      <mc:AlternateContent xmlns:mc="http://schemas.openxmlformats.org/markup-compatibility/2006" xmlns:a14="http://schemas.microsoft.com/office/drawing/2010/main">
+        <mc:Choice Requires="a14">
           <p:sp>
             <p:nvSpPr>
               <p:cNvPr id="5" name="TextBox 4">
@@ -13827,7 +13836,7 @@
             </p:txBody>
           </p:sp>
         </mc:Choice>
-        <mc:Fallback>
+        <mc:Fallback xmlns="">
           <p:sp>
             <p:nvSpPr>
               <p:cNvPr id="5" name="TextBox 4">
@@ -13872,8 +13881,8 @@
           </p:sp>
         </mc:Fallback>
       </mc:AlternateContent>
-      <mc:AlternateContent xmlns:mc="http://schemas.openxmlformats.org/markup-compatibility/2006">
-        <mc:Choice xmlns:a14="http://schemas.microsoft.com/office/drawing/2010/main" Requires="a14">
+      <mc:AlternateContent xmlns:mc="http://schemas.openxmlformats.org/markup-compatibility/2006" xmlns:a14="http://schemas.microsoft.com/office/drawing/2010/main">
+        <mc:Choice Requires="a14">
           <p:sp>
             <p:nvSpPr>
               <p:cNvPr id="7" name="TextBox 6">
@@ -13988,7 +13997,7 @@
             </p:txBody>
           </p:sp>
         </mc:Choice>
-        <mc:Fallback>
+        <mc:Fallback xmlns="">
           <p:sp>
             <p:nvSpPr>
               <p:cNvPr id="7" name="TextBox 6">
@@ -14556,8 +14565,8 @@
           </a:p>
         </p:txBody>
       </p:sp>
-      <mc:AlternateContent xmlns:mc="http://schemas.openxmlformats.org/markup-compatibility/2006">
-        <mc:Choice xmlns:a14="http://schemas.microsoft.com/office/drawing/2010/main" Requires="a14">
+      <mc:AlternateContent xmlns:mc="http://schemas.openxmlformats.org/markup-compatibility/2006" xmlns:a14="http://schemas.microsoft.com/office/drawing/2010/main">
+        <mc:Choice Requires="a14">
           <p:sp>
             <p:nvSpPr>
               <p:cNvPr id="34" name="TextBox 33">
@@ -14607,7 +14616,7 @@
             </p:txBody>
           </p:sp>
         </mc:Choice>
-        <mc:Fallback>
+        <mc:Fallback xmlns="">
           <p:sp>
             <p:nvSpPr>
               <p:cNvPr id="34" name="TextBox 33">
@@ -15339,8 +15348,8 @@
           </a:p>
         </p:txBody>
       </p:sp>
-      <mc:AlternateContent xmlns:mc="http://schemas.openxmlformats.org/markup-compatibility/2006">
-        <mc:Choice xmlns:a14="http://schemas.microsoft.com/office/drawing/2010/main" Requires="a14">
+      <mc:AlternateContent xmlns:mc="http://schemas.openxmlformats.org/markup-compatibility/2006" xmlns:a14="http://schemas.microsoft.com/office/drawing/2010/main">
+        <mc:Choice Requires="a14">
           <p:sp>
             <p:nvSpPr>
               <p:cNvPr id="8" name="TextBox 7">
@@ -15449,7 +15458,7 @@
             </p:txBody>
           </p:sp>
         </mc:Choice>
-        <mc:Fallback>
+        <mc:Fallback xmlns="">
           <p:sp>
             <p:nvSpPr>
               <p:cNvPr id="8" name="TextBox 7">
@@ -15550,8 +15559,8 @@
           </a:p>
         </p:txBody>
       </p:sp>
-      <mc:AlternateContent xmlns:mc="http://schemas.openxmlformats.org/markup-compatibility/2006">
-        <mc:Choice xmlns:a14="http://schemas.microsoft.com/office/drawing/2010/main" Requires="a14">
+      <mc:AlternateContent xmlns:mc="http://schemas.openxmlformats.org/markup-compatibility/2006" xmlns:a14="http://schemas.microsoft.com/office/drawing/2010/main">
+        <mc:Choice Requires="a14">
           <p:sp>
             <p:nvSpPr>
               <p:cNvPr id="10" name="TextBox 9">
@@ -15660,7 +15669,7 @@
             </p:txBody>
           </p:sp>
         </mc:Choice>
-        <mc:Fallback>
+        <mc:Fallback xmlns="">
           <p:sp>
             <p:nvSpPr>
               <p:cNvPr id="10" name="TextBox 9">
@@ -15761,8 +15770,8 @@
           </a:p>
         </p:txBody>
       </p:sp>
-      <mc:AlternateContent xmlns:mc="http://schemas.openxmlformats.org/markup-compatibility/2006">
-        <mc:Choice xmlns:a14="http://schemas.microsoft.com/office/drawing/2010/main" Requires="a14">
+      <mc:AlternateContent xmlns:mc="http://schemas.openxmlformats.org/markup-compatibility/2006" xmlns:a14="http://schemas.microsoft.com/office/drawing/2010/main">
+        <mc:Choice Requires="a14">
           <p:sp>
             <p:nvSpPr>
               <p:cNvPr id="12" name="TextBox 11">
@@ -15871,7 +15880,7 @@
             </p:txBody>
           </p:sp>
         </mc:Choice>
-        <mc:Fallback>
+        <mc:Fallback xmlns="">
           <p:sp>
             <p:nvSpPr>
               <p:cNvPr id="12" name="TextBox 11">
@@ -15972,8 +15981,8 @@
           </a:p>
         </p:txBody>
       </p:sp>
-      <mc:AlternateContent xmlns:mc="http://schemas.openxmlformats.org/markup-compatibility/2006">
-        <mc:Choice xmlns:a14="http://schemas.microsoft.com/office/drawing/2010/main" Requires="a14">
+      <mc:AlternateContent xmlns:mc="http://schemas.openxmlformats.org/markup-compatibility/2006" xmlns:a14="http://schemas.microsoft.com/office/drawing/2010/main">
+        <mc:Choice Requires="a14">
           <p:sp>
             <p:nvSpPr>
               <p:cNvPr id="21" name="TextBox 20">
@@ -16082,7 +16091,7 @@
             </p:txBody>
           </p:sp>
         </mc:Choice>
-        <mc:Fallback>
+        <mc:Fallback xmlns="">
           <p:sp>
             <p:nvSpPr>
               <p:cNvPr id="21" name="TextBox 20">
@@ -16127,8 +16136,8 @@
           </p:sp>
         </mc:Fallback>
       </mc:AlternateContent>
-      <mc:AlternateContent xmlns:mc="http://schemas.openxmlformats.org/markup-compatibility/2006">
-        <mc:Choice xmlns:a14="http://schemas.microsoft.com/office/drawing/2010/main" Requires="a14">
+      <mc:AlternateContent xmlns:mc="http://schemas.openxmlformats.org/markup-compatibility/2006" xmlns:a14="http://schemas.microsoft.com/office/drawing/2010/main">
+        <mc:Choice Requires="a14">
           <p:sp>
             <p:nvSpPr>
               <p:cNvPr id="44" name="TextBox 43">
@@ -16257,7 +16266,7 @@
             </p:txBody>
           </p:sp>
         </mc:Choice>
-        <mc:Fallback>
+        <mc:Fallback xmlns="">
           <p:sp>
             <p:nvSpPr>
               <p:cNvPr id="44" name="TextBox 43">
@@ -16410,8 +16419,8 @@
           </a:p>
         </p:txBody>
       </p:sp>
-      <mc:AlternateContent xmlns:mc="http://schemas.openxmlformats.org/markup-compatibility/2006">
-        <mc:Choice xmlns:a14="http://schemas.microsoft.com/office/drawing/2010/main" Requires="a14">
+      <mc:AlternateContent xmlns:mc="http://schemas.openxmlformats.org/markup-compatibility/2006" xmlns:a14="http://schemas.microsoft.com/office/drawing/2010/main">
+        <mc:Choice Requires="a14">
           <p:sp>
             <p:nvSpPr>
               <p:cNvPr id="34" name="TextBox 33">
@@ -16461,7 +16470,7 @@
             </p:txBody>
           </p:sp>
         </mc:Choice>
-        <mc:Fallback>
+        <mc:Fallback xmlns="">
           <p:sp>
             <p:nvSpPr>
               <p:cNvPr id="34" name="TextBox 33">
@@ -16506,8 +16515,8 @@
           </p:sp>
         </mc:Fallback>
       </mc:AlternateContent>
-      <mc:AlternateContent xmlns:mc="http://schemas.openxmlformats.org/markup-compatibility/2006">
-        <mc:Choice xmlns:a14="http://schemas.microsoft.com/office/drawing/2010/main" Requires="a14">
+      <mc:AlternateContent xmlns:mc="http://schemas.openxmlformats.org/markup-compatibility/2006" xmlns:a14="http://schemas.microsoft.com/office/drawing/2010/main">
+        <mc:Choice Requires="a14">
           <p:sp>
             <p:nvSpPr>
               <p:cNvPr id="3" name="TextBox 2">
@@ -16536,6 +16545,7 @@
               </a:bodyPr>
               <a:lstStyle/>
               <a:p>
+                <a:pPr/>
                 <a14:m>
                   <m:oMathPara xmlns:m="http://schemas.openxmlformats.org/officeDocument/2006/math">
                     <m:oMathParaPr>
@@ -16761,7 +16771,7 @@
             </p:txBody>
           </p:sp>
         </mc:Choice>
-        <mc:Fallback>
+        <mc:Fallback xmlns="">
           <p:sp>
             <p:nvSpPr>
               <p:cNvPr id="3" name="TextBox 2">
@@ -16806,8 +16816,8 @@
           </p:sp>
         </mc:Fallback>
       </mc:AlternateContent>
-      <mc:AlternateContent xmlns:mc="http://schemas.openxmlformats.org/markup-compatibility/2006">
-        <mc:Choice xmlns:a14="http://schemas.microsoft.com/office/drawing/2010/main" Requires="a14">
+      <mc:AlternateContent xmlns:mc="http://schemas.openxmlformats.org/markup-compatibility/2006" xmlns:a14="http://schemas.microsoft.com/office/drawing/2010/main">
+        <mc:Choice Requires="a14">
           <p:sp>
             <p:nvSpPr>
               <p:cNvPr id="4" name="TextBox 3">
@@ -16836,6 +16846,7 @@
               </a:bodyPr>
               <a:lstStyle/>
               <a:p>
+                <a:pPr/>
                 <a14:m>
                   <m:oMathPara xmlns:m="http://schemas.openxmlformats.org/officeDocument/2006/math">
                     <m:oMathParaPr>
@@ -16921,7 +16932,7 @@
             </p:txBody>
           </p:sp>
         </mc:Choice>
-        <mc:Fallback>
+        <mc:Fallback xmlns="">
           <p:sp>
             <p:nvSpPr>
               <p:cNvPr id="4" name="TextBox 3">
@@ -17359,8 +17370,8 @@
           </a:p>
         </p:txBody>
       </p:sp>
-      <mc:AlternateContent xmlns:mc="http://schemas.openxmlformats.org/markup-compatibility/2006">
-        <mc:Choice xmlns:a14="http://schemas.microsoft.com/office/drawing/2010/main" Requires="a14">
+      <mc:AlternateContent xmlns:mc="http://schemas.openxmlformats.org/markup-compatibility/2006" xmlns:a14="http://schemas.microsoft.com/office/drawing/2010/main">
+        <mc:Choice Requires="a14">
           <p:graphicFrame>
             <p:nvGraphicFramePr>
               <p:cNvPr id="5" name="Table 4">
@@ -17434,6 +17445,7 @@
                         <a:bodyPr/>
                         <a:lstStyle/>
                         <a:p>
+                          <a:pPr/>
                           <a14:m>
                             <m:oMathPara xmlns:m="http://schemas.openxmlformats.org/officeDocument/2006/math">
                               <m:oMathParaPr>
@@ -17477,6 +17489,7 @@
                         <a:bodyPr/>
                         <a:lstStyle/>
                         <a:p>
+                          <a:pPr/>
                           <a14:m>
                             <m:oMathPara xmlns:m="http://schemas.openxmlformats.org/officeDocument/2006/math">
                               <m:oMathParaPr>
@@ -17514,6 +17527,7 @@
                         <a:bodyPr/>
                         <a:lstStyle/>
                         <a:p>
+                          <a:pPr/>
                           <a14:m>
                             <m:oMathPara xmlns:m="http://schemas.openxmlformats.org/officeDocument/2006/math">
                               <m:oMathParaPr>
@@ -17563,6 +17577,7 @@
                         <a:bodyPr/>
                         <a:lstStyle/>
                         <a:p>
+                          <a:pPr/>
                           <a14:m>
                             <m:oMathPara xmlns:m="http://schemas.openxmlformats.org/officeDocument/2006/math">
                               <m:oMathParaPr>
@@ -17612,6 +17627,7 @@
                         <a:bodyPr/>
                         <a:lstStyle/>
                         <a:p>
+                          <a:pPr/>
                           <a14:m>
                             <m:oMathPara xmlns:m="http://schemas.openxmlformats.org/officeDocument/2006/math">
                               <m:oMathParaPr>
@@ -17680,6 +17696,7 @@
                         <a:bodyPr/>
                         <a:lstStyle/>
                         <a:p>
+                          <a:pPr/>
                           <a14:m>
                             <m:oMathPara xmlns:m="http://schemas.openxmlformats.org/officeDocument/2006/math">
                               <m:oMathParaPr>
@@ -17953,6 +17970,7 @@
                         <a:bodyPr/>
                         <a:lstStyle/>
                         <a:p>
+                          <a:pPr/>
                           <a14:m>
                             <m:oMathPara xmlns:m="http://schemas.openxmlformats.org/officeDocument/2006/math">
                               <m:oMathParaPr>
@@ -18060,13 +18078,7 @@
                                     <a:rPr lang="en-US" b="0" i="1" smtClean="0">
                                       <a:latin typeface="Cambria Math" panose="02040503050406030204" pitchFamily="18" charset="0"/>
                                     </a:rPr>
-                                    <m:t>−</m:t>
-                                  </m:r>
-                                  <m:r>
-                                    <a:rPr lang="en-US" b="0" i="1" smtClean="0">
-                                      <a:latin typeface="Cambria Math" panose="02040503050406030204" pitchFamily="18" charset="0"/>
-                                    </a:rPr>
-                                    <m:t>6</m:t>
+                                    <m:t>−6</m:t>
                                   </m:r>
                                 </m:sup>
                               </m:sSup>
@@ -18138,6 +18150,7 @@
                         <a:bodyPr/>
                         <a:lstStyle/>
                         <a:p>
+                          <a:pPr/>
                           <a14:m>
                             <m:oMathPara xmlns:m="http://schemas.openxmlformats.org/officeDocument/2006/math">
                               <m:oMathParaPr>
@@ -18253,13 +18266,7 @@
                                     <a:rPr lang="en-US" b="0" i="1" smtClean="0">
                                       <a:latin typeface="Cambria Math" panose="02040503050406030204" pitchFamily="18" charset="0"/>
                                     </a:rPr>
-                                    <m:t>−</m:t>
-                                  </m:r>
-                                  <m:r>
-                                    <a:rPr lang="en-US" b="0" i="1" smtClean="0">
-                                      <a:latin typeface="Cambria Math" panose="02040503050406030204" pitchFamily="18" charset="0"/>
-                                    </a:rPr>
-                                    <m:t>8</m:t>
+                                    <m:t>−8</m:t>
                                   </m:r>
                                 </m:sup>
                               </m:sSup>
@@ -18318,13 +18325,7 @@
                                     <a:rPr lang="en-US" b="0" i="1" smtClean="0">
                                       <a:latin typeface="Cambria Math" panose="02040503050406030204" pitchFamily="18" charset="0"/>
                                     </a:rPr>
-                                    <m:t>−</m:t>
-                                  </m:r>
-                                  <m:r>
-                                    <a:rPr lang="en-US" b="0" i="1" smtClean="0">
-                                      <a:latin typeface="Cambria Math" panose="02040503050406030204" pitchFamily="18" charset="0"/>
-                                    </a:rPr>
-                                    <m:t>5</m:t>
+                                    <m:t>−5</m:t>
                                   </m:r>
                                 </m:sup>
                               </m:sSup>
@@ -18396,6 +18397,7 @@
                         <a:bodyPr/>
                         <a:lstStyle/>
                         <a:p>
+                          <a:pPr/>
                           <a14:m>
                             <m:oMathPara xmlns:m="http://schemas.openxmlformats.org/officeDocument/2006/math">
                               <m:oMathParaPr>
@@ -18480,13 +18482,7 @@
                                     <a:rPr lang="en-US" b="0" i="1" smtClean="0">
                                       <a:latin typeface="Cambria Math" panose="02040503050406030204" pitchFamily="18" charset="0"/>
                                     </a:rPr>
-                                    <m:t>−</m:t>
-                                  </m:r>
-                                  <m:r>
-                                    <a:rPr lang="en-US" b="0" i="1" smtClean="0">
-                                      <a:latin typeface="Cambria Math" panose="02040503050406030204" pitchFamily="18" charset="0"/>
-                                    </a:rPr>
-                                    <m:t>7</m:t>
+                                    <m:t>−7</m:t>
                                   </m:r>
                                 </m:sup>
                               </m:sSup>
@@ -18581,6 +18577,7 @@
                         <a:bodyPr/>
                         <a:lstStyle/>
                         <a:p>
+                          <a:pPr/>
                           <a14:m>
                             <m:oMathPara xmlns:m="http://schemas.openxmlformats.org/officeDocument/2006/math">
                               <m:oMathParaPr>
@@ -18665,13 +18662,7 @@
                                     <a:rPr lang="en-US" b="0" i="1" smtClean="0">
                                       <a:latin typeface="Cambria Math" panose="02040503050406030204" pitchFamily="18" charset="0"/>
                                     </a:rPr>
-                                    <m:t>−</m:t>
-                                  </m:r>
-                                  <m:r>
-                                    <a:rPr lang="en-US" b="0" i="1" smtClean="0">
-                                      <a:latin typeface="Cambria Math" panose="02040503050406030204" pitchFamily="18" charset="0"/>
-                                    </a:rPr>
-                                    <m:t>6</m:t>
+                                    <m:t>−6</m:t>
                                   </m:r>
                                 </m:sup>
                               </m:sSup>
@@ -18766,6 +18757,7 @@
                         <a:bodyPr/>
                         <a:lstStyle/>
                         <a:p>
+                          <a:pPr/>
                           <a14:m>
                             <m:oMathPara xmlns:m="http://schemas.openxmlformats.org/officeDocument/2006/math">
                               <m:oMathParaPr>
@@ -18850,13 +18842,7 @@
                                     <a:rPr lang="en-US" b="0" i="1" smtClean="0">
                                       <a:latin typeface="Cambria Math" panose="02040503050406030204" pitchFamily="18" charset="0"/>
                                     </a:rPr>
-                                    <m:t>−</m:t>
-                                  </m:r>
-                                  <m:r>
-                                    <a:rPr lang="en-US" b="0" i="1" smtClean="0">
-                                      <a:latin typeface="Cambria Math" panose="02040503050406030204" pitchFamily="18" charset="0"/>
-                                    </a:rPr>
-                                    <m:t>6</m:t>
+                                    <m:t>−6</m:t>
                                   </m:r>
                                 </m:sup>
                               </m:sSup>
@@ -19025,7 +19011,7 @@
             </a:graphic>
           </p:graphicFrame>
         </mc:Choice>
-        <mc:Fallback>
+        <mc:Fallback xmlns="">
           <p:graphicFrame>
             <p:nvGraphicFramePr>
               <p:cNvPr id="5" name="Table 4">
@@ -19743,8 +19729,8 @@
           </p:graphicFrame>
         </mc:Fallback>
       </mc:AlternateContent>
-      <mc:AlternateContent xmlns:mc="http://schemas.openxmlformats.org/markup-compatibility/2006">
-        <mc:Choice xmlns:a14="http://schemas.microsoft.com/office/drawing/2010/main" Requires="a14">
+      <mc:AlternateContent xmlns:mc="http://schemas.openxmlformats.org/markup-compatibility/2006" xmlns:a14="http://schemas.microsoft.com/office/drawing/2010/main">
+        <mc:Choice Requires="a14">
           <p:sp>
             <p:nvSpPr>
               <p:cNvPr id="17" name="TextBox 16">
@@ -19827,7 +19813,7 @@
             </p:txBody>
           </p:sp>
         </mc:Choice>
-        <mc:Fallback>
+        <mc:Fallback xmlns="">
           <p:sp>
             <p:nvSpPr>
               <p:cNvPr id="17" name="TextBox 16">
@@ -20243,8 +20229,8 @@
           </a:fontRef>
         </p:style>
       </p:cxnSp>
-      <mc:AlternateContent xmlns:mc="http://schemas.openxmlformats.org/markup-compatibility/2006">
-        <mc:Choice xmlns:a14="http://schemas.microsoft.com/office/drawing/2010/main" Requires="a14">
+      <mc:AlternateContent xmlns:mc="http://schemas.openxmlformats.org/markup-compatibility/2006" xmlns:a14="http://schemas.microsoft.com/office/drawing/2010/main">
+        <mc:Choice Requires="a14">
           <p:sp>
             <p:nvSpPr>
               <p:cNvPr id="16" name="TextBox 15">
@@ -20332,7 +20318,7 @@
             </p:txBody>
           </p:sp>
         </mc:Choice>
-        <mc:Fallback>
+        <mc:Fallback xmlns="">
           <p:sp>
             <p:nvSpPr>
               <p:cNvPr id="16" name="TextBox 15">
@@ -20377,8 +20363,8 @@
           </p:sp>
         </mc:Fallback>
       </mc:AlternateContent>
-      <mc:AlternateContent xmlns:mc="http://schemas.openxmlformats.org/markup-compatibility/2006">
-        <mc:Choice xmlns:a14="http://schemas.microsoft.com/office/drawing/2010/main" Requires="a14">
+      <mc:AlternateContent xmlns:mc="http://schemas.openxmlformats.org/markup-compatibility/2006" xmlns:a14="http://schemas.microsoft.com/office/drawing/2010/main">
+        <mc:Choice Requires="a14">
           <p:sp>
             <p:nvSpPr>
               <p:cNvPr id="17" name="TextBox 16">
@@ -20445,7 +20431,7 @@
             </p:txBody>
           </p:sp>
         </mc:Choice>
-        <mc:Fallback>
+        <mc:Fallback xmlns="">
           <p:sp>
             <p:nvSpPr>
               <p:cNvPr id="17" name="TextBox 16">
@@ -20595,7 +20581,7 @@
             <p:spPr>
               <a:xfrm>
                 <a:off x="5671864" y="5270512"/>
-                <a:ext cx="5823450" cy="1046440"/>
+                <a:ext cx="5823450" cy="1031051"/>
               </a:xfrm>
               <a:prstGeom prst="rect">
                 <a:avLst/>
@@ -20626,10 +20612,13 @@
                 <a14:m>
                   <m:oMath xmlns:m="http://schemas.openxmlformats.org/officeDocument/2006/math">
                     <m:r>
-                      <a:rPr lang="en-US" sz="2800" b="0" i="1" smtClean="0">
+                      <m:rPr>
+                        <m:sty m:val="p"/>
+                      </m:rPr>
+                      <a:rPr lang="en-US" sz="2800" b="0" i="0" smtClean="0">
                         <a:latin typeface="Cambria Math" panose="02040503050406030204" pitchFamily="18" charset="0"/>
                       </a:rPr>
-                      <m:t>𝑂</m:t>
+                      <m:t>Θ</m:t>
                     </m:r>
                     <m:r>
                       <a:rPr lang="en-US" sz="2800" b="0" i="1" smtClean="0">
@@ -20694,7 +20683,7 @@
             <p:spPr>
               <a:xfrm>
                 <a:off x="5671864" y="5270512"/>
-                <a:ext cx="5823450" cy="1046440"/>
+                <a:ext cx="5823450" cy="1031051"/>
               </a:xfrm>
               <a:prstGeom prst="rect">
                 <a:avLst/>
@@ -20702,7 +20691,7 @@
               <a:blipFill>
                 <a:blip r:embed="rId5"/>
                 <a:stretch>
-                  <a:fillRect l="-523" t="-7018" r="-418" b="-14620"/>
+                  <a:fillRect l="-435" t="-7317" r="-435" b="-14634"/>
                 </a:stretch>
               </a:blipFill>
             </p:spPr>
